--- a/namu.pptx
+++ b/namu.pptx
@@ -6,27 +6,29 @@
   </p:sldMasterIdLst>
   <p:sldIdLst>
     <p:sldId id="256" r:id="rId2"/>
-    <p:sldId id="291" r:id="rId3"/>
-    <p:sldId id="299" r:id="rId4"/>
-    <p:sldId id="275" r:id="rId5"/>
-    <p:sldId id="300" r:id="rId6"/>
-    <p:sldId id="301" r:id="rId7"/>
-    <p:sldId id="302" r:id="rId8"/>
-    <p:sldId id="304" r:id="rId9"/>
-    <p:sldId id="295" r:id="rId10"/>
-    <p:sldId id="292" r:id="rId11"/>
-    <p:sldId id="274" r:id="rId12"/>
-    <p:sldId id="276" r:id="rId13"/>
-    <p:sldId id="277" r:id="rId14"/>
-    <p:sldId id="278" r:id="rId15"/>
-    <p:sldId id="279" r:id="rId16"/>
-    <p:sldId id="280" r:id="rId17"/>
-    <p:sldId id="281" r:id="rId18"/>
-    <p:sldId id="282" r:id="rId19"/>
-    <p:sldId id="283" r:id="rId20"/>
-    <p:sldId id="296" r:id="rId21"/>
-    <p:sldId id="297" r:id="rId22"/>
-    <p:sldId id="298" r:id="rId23"/>
+    <p:sldId id="305" r:id="rId3"/>
+    <p:sldId id="306" r:id="rId4"/>
+    <p:sldId id="291" r:id="rId5"/>
+    <p:sldId id="299" r:id="rId6"/>
+    <p:sldId id="275" r:id="rId7"/>
+    <p:sldId id="300" r:id="rId8"/>
+    <p:sldId id="301" r:id="rId9"/>
+    <p:sldId id="302" r:id="rId10"/>
+    <p:sldId id="304" r:id="rId11"/>
+    <p:sldId id="295" r:id="rId12"/>
+    <p:sldId id="292" r:id="rId13"/>
+    <p:sldId id="274" r:id="rId14"/>
+    <p:sldId id="276" r:id="rId15"/>
+    <p:sldId id="277" r:id="rId16"/>
+    <p:sldId id="278" r:id="rId17"/>
+    <p:sldId id="279" r:id="rId18"/>
+    <p:sldId id="280" r:id="rId19"/>
+    <p:sldId id="281" r:id="rId20"/>
+    <p:sldId id="282" r:id="rId21"/>
+    <p:sldId id="283" r:id="rId22"/>
+    <p:sldId id="296" r:id="rId23"/>
+    <p:sldId id="297" r:id="rId24"/>
+    <p:sldId id="298" r:id="rId25"/>
   </p:sldIdLst>
   <p:sldSz cx="12192000" cy="6858000"/>
   <p:notesSz cx="6858000" cy="9144000"/>
@@ -264,7 +266,7 @@
           <a:p>
             <a:fld id="{C1FBF397-E9B3-4A39-BA8C-ED76B10DB6CA}" type="datetimeFigureOut">
               <a:rPr lang="ko-KR" altLang="en-US" smtClean="0"/>
-              <a:t>2026-05-28</a:t>
+              <a:t>2026-06-01</a:t>
             </a:fld>
             <a:endParaRPr lang="ko-KR" altLang="en-US"/>
           </a:p>
@@ -434,7 +436,7 @@
           <a:p>
             <a:fld id="{C1FBF397-E9B3-4A39-BA8C-ED76B10DB6CA}" type="datetimeFigureOut">
               <a:rPr lang="ko-KR" altLang="en-US" smtClean="0"/>
-              <a:t>2026-05-28</a:t>
+              <a:t>2026-06-01</a:t>
             </a:fld>
             <a:endParaRPr lang="ko-KR" altLang="en-US"/>
           </a:p>
@@ -614,7 +616,7 @@
           <a:p>
             <a:fld id="{C1FBF397-E9B3-4A39-BA8C-ED76B10DB6CA}" type="datetimeFigureOut">
               <a:rPr lang="ko-KR" altLang="en-US" smtClean="0"/>
-              <a:t>2026-05-28</a:t>
+              <a:t>2026-06-01</a:t>
             </a:fld>
             <a:endParaRPr lang="ko-KR" altLang="en-US"/>
           </a:p>
@@ -784,7 +786,7 @@
           <a:p>
             <a:fld id="{C1FBF397-E9B3-4A39-BA8C-ED76B10DB6CA}" type="datetimeFigureOut">
               <a:rPr lang="ko-KR" altLang="en-US" smtClean="0"/>
-              <a:t>2026-05-28</a:t>
+              <a:t>2026-06-01</a:t>
             </a:fld>
             <a:endParaRPr lang="ko-KR" altLang="en-US"/>
           </a:p>
@@ -1030,7 +1032,7 @@
           <a:p>
             <a:fld id="{C1FBF397-E9B3-4A39-BA8C-ED76B10DB6CA}" type="datetimeFigureOut">
               <a:rPr lang="ko-KR" altLang="en-US" smtClean="0"/>
-              <a:t>2026-05-28</a:t>
+              <a:t>2026-06-01</a:t>
             </a:fld>
             <a:endParaRPr lang="ko-KR" altLang="en-US"/>
           </a:p>
@@ -1262,7 +1264,7 @@
           <a:p>
             <a:fld id="{C1FBF397-E9B3-4A39-BA8C-ED76B10DB6CA}" type="datetimeFigureOut">
               <a:rPr lang="ko-KR" altLang="en-US" smtClean="0"/>
-              <a:t>2026-05-28</a:t>
+              <a:t>2026-06-01</a:t>
             </a:fld>
             <a:endParaRPr lang="ko-KR" altLang="en-US"/>
           </a:p>
@@ -1629,7 +1631,7 @@
           <a:p>
             <a:fld id="{C1FBF397-E9B3-4A39-BA8C-ED76B10DB6CA}" type="datetimeFigureOut">
               <a:rPr lang="ko-KR" altLang="en-US" smtClean="0"/>
-              <a:t>2026-05-28</a:t>
+              <a:t>2026-06-01</a:t>
             </a:fld>
             <a:endParaRPr lang="ko-KR" altLang="en-US"/>
           </a:p>
@@ -1747,7 +1749,7 @@
           <a:p>
             <a:fld id="{C1FBF397-E9B3-4A39-BA8C-ED76B10DB6CA}" type="datetimeFigureOut">
               <a:rPr lang="ko-KR" altLang="en-US" smtClean="0"/>
-              <a:t>2026-05-28</a:t>
+              <a:t>2026-06-01</a:t>
             </a:fld>
             <a:endParaRPr lang="ko-KR" altLang="en-US"/>
           </a:p>
@@ -1842,7 +1844,7 @@
           <a:p>
             <a:fld id="{C1FBF397-E9B3-4A39-BA8C-ED76B10DB6CA}" type="datetimeFigureOut">
               <a:rPr lang="ko-KR" altLang="en-US" smtClean="0"/>
-              <a:t>2026-05-28</a:t>
+              <a:t>2026-06-01</a:t>
             </a:fld>
             <a:endParaRPr lang="ko-KR" altLang="en-US"/>
           </a:p>
@@ -2119,7 +2121,7 @@
           <a:p>
             <a:fld id="{C1FBF397-E9B3-4A39-BA8C-ED76B10DB6CA}" type="datetimeFigureOut">
               <a:rPr lang="ko-KR" altLang="en-US" smtClean="0"/>
-              <a:t>2026-05-28</a:t>
+              <a:t>2026-06-01</a:t>
             </a:fld>
             <a:endParaRPr lang="ko-KR" altLang="en-US"/>
           </a:p>
@@ -2372,7 +2374,7 @@
           <a:p>
             <a:fld id="{C1FBF397-E9B3-4A39-BA8C-ED76B10DB6CA}" type="datetimeFigureOut">
               <a:rPr lang="ko-KR" altLang="en-US" smtClean="0"/>
-              <a:t>2026-05-28</a:t>
+              <a:t>2026-06-01</a:t>
             </a:fld>
             <a:endParaRPr lang="ko-KR" altLang="en-US"/>
           </a:p>
@@ -2585,7 +2587,7 @@
           <a:p>
             <a:fld id="{C1FBF397-E9B3-4A39-BA8C-ED76B10DB6CA}" type="datetimeFigureOut">
               <a:rPr lang="ko-KR" altLang="en-US" smtClean="0"/>
-              <a:t>2026-05-28</a:t>
+              <a:t>2026-06-01</a:t>
             </a:fld>
             <a:endParaRPr lang="ko-KR" altLang="en-US"/>
           </a:p>
@@ -3066,6 +3068,102 @@
           <a:chExt cx="0" cy="0"/>
         </a:xfrm>
       </p:grpSpPr>
+    </p:spTree>
+    <p:extLst>
+      <p:ext uri="{BB962C8B-B14F-4D97-AF65-F5344CB8AC3E}">
+        <p14:creationId xmlns:p14="http://schemas.microsoft.com/office/powerpoint/2010/main" val="884528956"/>
+      </p:ext>
+    </p:extLst>
+  </p:cSld>
+  <p:clrMapOvr>
+    <a:masterClrMapping/>
+  </p:clrMapOvr>
+</p:sld>
+</file>
+
+<file path=ppt/slides/slide11.xml><?xml version="1.0" encoding="utf-8"?>
+<p:sld xmlns:a="http://schemas.openxmlformats.org/drawingml/2006/main" xmlns:r="http://schemas.openxmlformats.org/officeDocument/2006/relationships" xmlns:p="http://schemas.openxmlformats.org/presentationml/2006/main">
+  <p:cSld>
+    <p:spTree>
+      <p:nvGrpSpPr>
+        <p:cNvPr id="1" name=""/>
+        <p:cNvGrpSpPr/>
+        <p:nvPr/>
+      </p:nvGrpSpPr>
+      <p:grpSpPr>
+        <a:xfrm>
+          <a:off x="0" y="0"/>
+          <a:ext cx="0" cy="0"/>
+          <a:chOff x="0" y="0"/>
+          <a:chExt cx="0" cy="0"/>
+        </a:xfrm>
+      </p:grpSpPr>
+      <p:sp>
+        <p:nvSpPr>
+          <p:cNvPr id="7" name="제목 6"/>
+          <p:cNvSpPr>
+            <a:spLocks noGrp="1"/>
+          </p:cNvSpPr>
+          <p:nvPr>
+            <p:ph type="ctrTitle"/>
+          </p:nvPr>
+        </p:nvSpPr>
+        <p:spPr>
+          <a:xfrm>
+            <a:off x="1524000" y="2296822"/>
+            <a:ext cx="9144000" cy="2387600"/>
+          </a:xfrm>
+        </p:spPr>
+        <p:txBody>
+          <a:bodyPr anchor="ctr"/>
+          <a:lstStyle/>
+          <a:p>
+            <a:r>
+              <a:rPr lang="en-US" altLang="ko-KR" dirty="0"/>
+              <a:t>5</a:t>
+            </a:r>
+            <a:r>
+              <a:rPr lang="en-US" altLang="ko-KR" dirty="0" smtClean="0"/>
+              <a:t> </a:t>
+            </a:r>
+            <a:r>
+              <a:rPr lang="ko-KR" altLang="en-US" dirty="0" smtClean="0"/>
+              <a:t>정보 누출</a:t>
+            </a:r>
+            <a:endParaRPr lang="ko-KR" altLang="en-US" dirty="0"/>
+          </a:p>
+        </p:txBody>
+      </p:sp>
+    </p:spTree>
+    <p:extLst>
+      <p:ext uri="{BB962C8B-B14F-4D97-AF65-F5344CB8AC3E}">
+        <p14:creationId xmlns:p14="http://schemas.microsoft.com/office/powerpoint/2010/main" val="4132780744"/>
+      </p:ext>
+    </p:extLst>
+  </p:cSld>
+  <p:clrMapOvr>
+    <a:masterClrMapping/>
+  </p:clrMapOvr>
+</p:sld>
+</file>
+
+<file path=ppt/slides/slide12.xml><?xml version="1.0" encoding="utf-8"?>
+<p:sld xmlns:a="http://schemas.openxmlformats.org/drawingml/2006/main" xmlns:r="http://schemas.openxmlformats.org/officeDocument/2006/relationships" xmlns:p="http://schemas.openxmlformats.org/presentationml/2006/main">
+  <p:cSld>
+    <p:spTree>
+      <p:nvGrpSpPr>
+        <p:cNvPr id="1" name=""/>
+        <p:cNvGrpSpPr/>
+        <p:nvPr/>
+      </p:nvGrpSpPr>
+      <p:grpSpPr>
+        <a:xfrm>
+          <a:off x="0" y="0"/>
+          <a:ext cx="0" cy="0"/>
+          <a:chOff x="0" y="0"/>
+          <a:chExt cx="0" cy="0"/>
+        </a:xfrm>
+      </p:grpSpPr>
       <p:grpSp>
         <p:nvGrpSpPr>
           <p:cNvPr id="4" name="그룹 3"/>
@@ -3150,7 +3248,7 @@
 </p:sld>
 </file>
 
-<file path=ppt/slides/slide11.xml><?xml version="1.0" encoding="utf-8"?>
+<file path=ppt/slides/slide13.xml><?xml version="1.0" encoding="utf-8"?>
 <p:sld xmlns:a="http://schemas.openxmlformats.org/drawingml/2006/main" xmlns:r="http://schemas.openxmlformats.org/officeDocument/2006/relationships" xmlns:p="http://schemas.openxmlformats.org/presentationml/2006/main">
   <p:cSld>
     <p:spTree>
@@ -3337,7 +3435,7 @@
 </p:sld>
 </file>
 
-<file path=ppt/slides/slide12.xml><?xml version="1.0" encoding="utf-8"?>
+<file path=ppt/slides/slide14.xml><?xml version="1.0" encoding="utf-8"?>
 <p:sld xmlns:a="http://schemas.openxmlformats.org/drawingml/2006/main" xmlns:r="http://schemas.openxmlformats.org/officeDocument/2006/relationships" xmlns:p="http://schemas.openxmlformats.org/presentationml/2006/main">
   <p:cSld>
     <p:spTree>
@@ -3399,7 +3497,7 @@
 </p:sld>
 </file>
 
-<file path=ppt/slides/slide13.xml><?xml version="1.0" encoding="utf-8"?>
+<file path=ppt/slides/slide15.xml><?xml version="1.0" encoding="utf-8"?>
 <p:sld xmlns:a="http://schemas.openxmlformats.org/drawingml/2006/main" xmlns:r="http://schemas.openxmlformats.org/officeDocument/2006/relationships" xmlns:p="http://schemas.openxmlformats.org/presentationml/2006/main">
   <p:cSld>
     <p:spTree>
@@ -3500,7 +3598,7 @@
 </p:sld>
 </file>
 
-<file path=ppt/slides/slide14.xml><?xml version="1.0" encoding="utf-8"?>
+<file path=ppt/slides/slide16.xml><?xml version="1.0" encoding="utf-8"?>
 <p:sld xmlns:a="http://schemas.openxmlformats.org/drawingml/2006/main" xmlns:r="http://schemas.openxmlformats.org/officeDocument/2006/relationships" xmlns:p="http://schemas.openxmlformats.org/presentationml/2006/main">
   <p:cSld>
     <p:spTree>
@@ -3737,7 +3835,7 @@
 </p:sld>
 </file>
 
-<file path=ppt/slides/slide15.xml><?xml version="1.0" encoding="utf-8"?>
+<file path=ppt/slides/slide17.xml><?xml version="1.0" encoding="utf-8"?>
 <p:sld xmlns:a="http://schemas.openxmlformats.org/drawingml/2006/main" xmlns:r="http://schemas.openxmlformats.org/officeDocument/2006/relationships" xmlns:p="http://schemas.openxmlformats.org/presentationml/2006/main">
   <p:cSld>
     <p:spTree>
@@ -3815,7 +3913,7 @@
 </p:sld>
 </file>
 
-<file path=ppt/slides/slide16.xml><?xml version="1.0" encoding="utf-8"?>
+<file path=ppt/slides/slide18.xml><?xml version="1.0" encoding="utf-8"?>
 <p:sld xmlns:a="http://schemas.openxmlformats.org/drawingml/2006/main" xmlns:r="http://schemas.openxmlformats.org/officeDocument/2006/relationships" xmlns:p="http://schemas.openxmlformats.org/presentationml/2006/main">
   <p:cSld>
     <p:spTree>
@@ -3869,7 +3967,7 @@
 </p:sld>
 </file>
 
-<file path=ppt/slides/slide17.xml><?xml version="1.0" encoding="utf-8"?>
+<file path=ppt/slides/slide19.xml><?xml version="1.0" encoding="utf-8"?>
 <p:sld xmlns:a="http://schemas.openxmlformats.org/drawingml/2006/main" xmlns:r="http://schemas.openxmlformats.org/officeDocument/2006/relationships" xmlns:p="http://schemas.openxmlformats.org/presentationml/2006/main">
   <p:cSld>
     <p:spTree>
@@ -4002,7 +4100,73 @@
 </p:sld>
 </file>
 
-<file path=ppt/slides/slide18.xml><?xml version="1.0" encoding="utf-8"?>
+<file path=ppt/slides/slide2.xml><?xml version="1.0" encoding="utf-8"?>
+<p:sld xmlns:a="http://schemas.openxmlformats.org/drawingml/2006/main" xmlns:r="http://schemas.openxmlformats.org/officeDocument/2006/relationships" xmlns:p="http://schemas.openxmlformats.org/presentationml/2006/main">
+  <p:cSld>
+    <p:spTree>
+      <p:nvGrpSpPr>
+        <p:cNvPr id="1" name=""/>
+        <p:cNvGrpSpPr/>
+        <p:nvPr/>
+      </p:nvGrpSpPr>
+      <p:grpSpPr>
+        <a:xfrm>
+          <a:off x="0" y="0"/>
+          <a:ext cx="0" cy="0"/>
+          <a:chOff x="0" y="0"/>
+          <a:chExt cx="0" cy="0"/>
+        </a:xfrm>
+      </p:grpSpPr>
+      <p:sp>
+        <p:nvSpPr>
+          <p:cNvPr id="7" name="제목 6"/>
+          <p:cNvSpPr>
+            <a:spLocks noGrp="1"/>
+          </p:cNvSpPr>
+          <p:nvPr>
+            <p:ph type="ctrTitle"/>
+          </p:nvPr>
+        </p:nvSpPr>
+        <p:spPr>
+          <a:xfrm>
+            <a:off x="1524000" y="2296822"/>
+            <a:ext cx="9144000" cy="2387600"/>
+          </a:xfrm>
+        </p:spPr>
+        <p:txBody>
+          <a:bodyPr anchor="ctr"/>
+          <a:lstStyle/>
+          <a:p>
+            <a:r>
+              <a:rPr lang="en-US" altLang="ko-KR" dirty="0" smtClean="0"/>
+              <a:t>6 </a:t>
+            </a:r>
+            <a:r>
+              <a:rPr lang="ko-KR" altLang="en-US" dirty="0" smtClean="0"/>
+              <a:t>취약한 </a:t>
+            </a:r>
+            <a:r>
+              <a:rPr lang="en-US" altLang="ko-KR" dirty="0" smtClean="0"/>
+              <a:t>API</a:t>
+            </a:r>
+            <a:endParaRPr lang="ko-KR" altLang="en-US" dirty="0"/>
+          </a:p>
+        </p:txBody>
+      </p:sp>
+    </p:spTree>
+    <p:extLst>
+      <p:ext uri="{BB962C8B-B14F-4D97-AF65-F5344CB8AC3E}">
+        <p14:creationId xmlns:p14="http://schemas.microsoft.com/office/powerpoint/2010/main" val="2966196672"/>
+      </p:ext>
+    </p:extLst>
+  </p:cSld>
+  <p:clrMapOvr>
+    <a:masterClrMapping/>
+  </p:clrMapOvr>
+</p:sld>
+</file>
+
+<file path=ppt/slides/slide20.xml><?xml version="1.0" encoding="utf-8"?>
 <p:sld xmlns:a="http://schemas.openxmlformats.org/drawingml/2006/main" xmlns:r="http://schemas.openxmlformats.org/officeDocument/2006/relationships" xmlns:p="http://schemas.openxmlformats.org/presentationml/2006/main">
   <p:cSld>
     <p:spTree>
@@ -4127,7 +4291,7 @@
 </p:sld>
 </file>
 
-<file path=ppt/slides/slide19.xml><?xml version="1.0" encoding="utf-8"?>
+<file path=ppt/slides/slide21.xml><?xml version="1.0" encoding="utf-8"?>
 <p:sld xmlns:a="http://schemas.openxmlformats.org/drawingml/2006/main" xmlns:r="http://schemas.openxmlformats.org/officeDocument/2006/relationships" xmlns:p="http://schemas.openxmlformats.org/presentationml/2006/main">
   <p:cSld>
     <p:spTree>
@@ -4157,7 +4321,7 @@
 </p:sld>
 </file>
 
-<file path=ppt/slides/slide2.xml><?xml version="1.0" encoding="utf-8"?>
+<file path=ppt/slides/slide22.xml><?xml version="1.0" encoding="utf-8"?>
 <p:sld xmlns:a="http://schemas.openxmlformats.org/drawingml/2006/main" xmlns:r="http://schemas.openxmlformats.org/officeDocument/2006/relationships" xmlns:p="http://schemas.openxmlformats.org/presentationml/2006/main">
   <p:cSld>
     <p:spTree>
@@ -4195,68 +4359,6 @@
           <a:lstStyle/>
           <a:p>
             <a:r>
-              <a:rPr lang="en-US" altLang="ko-KR" smtClean="0"/>
-              <a:t>6 </a:t>
-            </a:r>
-            <a:r>
-              <a:rPr lang="ko-KR" altLang="en-US" smtClean="0"/>
-              <a:t>크로스사이트 스크립트</a:t>
-            </a:r>
-            <a:endParaRPr lang="ko-KR" altLang="en-US" dirty="0"/>
-          </a:p>
-        </p:txBody>
-      </p:sp>
-    </p:spTree>
-    <p:extLst>
-      <p:ext uri="{BB962C8B-B14F-4D97-AF65-F5344CB8AC3E}">
-        <p14:creationId xmlns:p14="http://schemas.microsoft.com/office/powerpoint/2010/main" val="2129871945"/>
-      </p:ext>
-    </p:extLst>
-  </p:cSld>
-  <p:clrMapOvr>
-    <a:masterClrMapping/>
-  </p:clrMapOvr>
-</p:sld>
-</file>
-
-<file path=ppt/slides/slide20.xml><?xml version="1.0" encoding="utf-8"?>
-<p:sld xmlns:a="http://schemas.openxmlformats.org/drawingml/2006/main" xmlns:r="http://schemas.openxmlformats.org/officeDocument/2006/relationships" xmlns:p="http://schemas.openxmlformats.org/presentationml/2006/main">
-  <p:cSld>
-    <p:spTree>
-      <p:nvGrpSpPr>
-        <p:cNvPr id="1" name=""/>
-        <p:cNvGrpSpPr/>
-        <p:nvPr/>
-      </p:nvGrpSpPr>
-      <p:grpSpPr>
-        <a:xfrm>
-          <a:off x="0" y="0"/>
-          <a:ext cx="0" cy="0"/>
-          <a:chOff x="0" y="0"/>
-          <a:chExt cx="0" cy="0"/>
-        </a:xfrm>
-      </p:grpSpPr>
-      <p:sp>
-        <p:nvSpPr>
-          <p:cNvPr id="7" name="제목 6"/>
-          <p:cNvSpPr>
-            <a:spLocks noGrp="1"/>
-          </p:cNvSpPr>
-          <p:nvPr>
-            <p:ph type="ctrTitle"/>
-          </p:nvPr>
-        </p:nvSpPr>
-        <p:spPr>
-          <a:xfrm>
-            <a:off x="1524000" y="2296822"/>
-            <a:ext cx="9144000" cy="2387600"/>
-          </a:xfrm>
-        </p:spPr>
-        <p:txBody>
-          <a:bodyPr anchor="ctr"/>
-          <a:lstStyle/>
-          <a:p>
-            <a:r>
               <a:rPr lang="en-US" altLang="ko-KR" dirty="0" smtClean="0"/>
               <a:t>16 </a:t>
             </a:r>
@@ -4281,7 +4383,7 @@
 </p:sld>
 </file>
 
-<file path=ppt/slides/slide21.xml><?xml version="1.0" encoding="utf-8"?>
+<file path=ppt/slides/slide23.xml><?xml version="1.0" encoding="utf-8"?>
 <p:sld xmlns:a="http://schemas.openxmlformats.org/drawingml/2006/main" xmlns:r="http://schemas.openxmlformats.org/officeDocument/2006/relationships" xmlns:p="http://schemas.openxmlformats.org/presentationml/2006/main">
   <p:cSld>
     <p:spTree>
@@ -4432,7 +4534,7 @@
 </p:sld>
 </file>
 
-<file path=ppt/slides/slide22.xml><?xml version="1.0" encoding="utf-8"?>
+<file path=ppt/slides/slide24.xml><?xml version="1.0" encoding="utf-8"?>
 <p:sld xmlns:a="http://schemas.openxmlformats.org/drawingml/2006/main" xmlns:r="http://schemas.openxmlformats.org/officeDocument/2006/relationships" xmlns:p="http://schemas.openxmlformats.org/presentationml/2006/main">
   <p:cSld>
     <p:spTree>
@@ -4559,6 +4661,98 @@
 </file>
 
 <file path=ppt/slides/slide3.xml><?xml version="1.0" encoding="utf-8"?>
+<p:sld xmlns:a="http://schemas.openxmlformats.org/drawingml/2006/main" xmlns:r="http://schemas.openxmlformats.org/officeDocument/2006/relationships" xmlns:p="http://schemas.openxmlformats.org/presentationml/2006/main">
+  <p:cSld>
+    <p:spTree>
+      <p:nvGrpSpPr>
+        <p:cNvPr id="1" name=""/>
+        <p:cNvGrpSpPr/>
+        <p:nvPr/>
+      </p:nvGrpSpPr>
+      <p:grpSpPr>
+        <a:xfrm>
+          <a:off x="0" y="0"/>
+          <a:ext cx="0" cy="0"/>
+          <a:chOff x="0" y="0"/>
+          <a:chExt cx="0" cy="0"/>
+        </a:xfrm>
+      </p:grpSpPr>
+    </p:spTree>
+    <p:extLst>
+      <p:ext uri="{BB962C8B-B14F-4D97-AF65-F5344CB8AC3E}">
+        <p14:creationId xmlns:p14="http://schemas.microsoft.com/office/powerpoint/2010/main" val="1268144831"/>
+      </p:ext>
+    </p:extLst>
+  </p:cSld>
+  <p:clrMapOvr>
+    <a:masterClrMapping/>
+  </p:clrMapOvr>
+</p:sld>
+</file>
+
+<file path=ppt/slides/slide4.xml><?xml version="1.0" encoding="utf-8"?>
+<p:sld xmlns:a="http://schemas.openxmlformats.org/drawingml/2006/main" xmlns:r="http://schemas.openxmlformats.org/officeDocument/2006/relationships" xmlns:p="http://schemas.openxmlformats.org/presentationml/2006/main">
+  <p:cSld>
+    <p:spTree>
+      <p:nvGrpSpPr>
+        <p:cNvPr id="1" name=""/>
+        <p:cNvGrpSpPr/>
+        <p:nvPr/>
+      </p:nvGrpSpPr>
+      <p:grpSpPr>
+        <a:xfrm>
+          <a:off x="0" y="0"/>
+          <a:ext cx="0" cy="0"/>
+          <a:chOff x="0" y="0"/>
+          <a:chExt cx="0" cy="0"/>
+        </a:xfrm>
+      </p:grpSpPr>
+      <p:sp>
+        <p:nvSpPr>
+          <p:cNvPr id="7" name="제목 6"/>
+          <p:cNvSpPr>
+            <a:spLocks noGrp="1"/>
+          </p:cNvSpPr>
+          <p:nvPr>
+            <p:ph type="ctrTitle"/>
+          </p:nvPr>
+        </p:nvSpPr>
+        <p:spPr>
+          <a:xfrm>
+            <a:off x="1524000" y="2296822"/>
+            <a:ext cx="9144000" cy="2387600"/>
+          </a:xfrm>
+        </p:spPr>
+        <p:txBody>
+          <a:bodyPr anchor="ctr"/>
+          <a:lstStyle/>
+          <a:p>
+            <a:r>
+              <a:rPr lang="en-US" altLang="ko-KR" smtClean="0"/>
+              <a:t>6 </a:t>
+            </a:r>
+            <a:r>
+              <a:rPr lang="ko-KR" altLang="en-US" smtClean="0"/>
+              <a:t>크로스사이트 스크립트</a:t>
+            </a:r>
+            <a:endParaRPr lang="ko-KR" altLang="en-US" dirty="0"/>
+          </a:p>
+        </p:txBody>
+      </p:sp>
+    </p:spTree>
+    <p:extLst>
+      <p:ext uri="{BB962C8B-B14F-4D97-AF65-F5344CB8AC3E}">
+        <p14:creationId xmlns:p14="http://schemas.microsoft.com/office/powerpoint/2010/main" val="2129871945"/>
+      </p:ext>
+    </p:extLst>
+  </p:cSld>
+  <p:clrMapOvr>
+    <a:masterClrMapping/>
+  </p:clrMapOvr>
+</p:sld>
+</file>
+
+<file path=ppt/slides/slide5.xml><?xml version="1.0" encoding="utf-8"?>
 <p:sld xmlns:a="http://schemas.openxmlformats.org/drawingml/2006/main" xmlns:r="http://schemas.openxmlformats.org/officeDocument/2006/relationships" xmlns:p="http://schemas.openxmlformats.org/presentationml/2006/main">
   <p:cSld>
     <p:spTree>
@@ -4727,7 +4921,7 @@
 </p:sld>
 </file>
 
-<file path=ppt/slides/slide4.xml><?xml version="1.0" encoding="utf-8"?>
+<file path=ppt/slides/slide6.xml><?xml version="1.0" encoding="utf-8"?>
 <p:sld xmlns:a="http://schemas.openxmlformats.org/drawingml/2006/main" xmlns:r="http://schemas.openxmlformats.org/officeDocument/2006/relationships" xmlns:p="http://schemas.openxmlformats.org/presentationml/2006/main">
   <p:cSld>
     <p:spTree>
@@ -4864,7 +5058,7 @@
 </p:sld>
 </file>
 
-<file path=ppt/slides/slide5.xml><?xml version="1.0" encoding="utf-8"?>
+<file path=ppt/slides/slide7.xml><?xml version="1.0" encoding="utf-8"?>
 <p:sld xmlns:a="http://schemas.openxmlformats.org/drawingml/2006/main" xmlns:r="http://schemas.openxmlformats.org/officeDocument/2006/relationships" xmlns:p="http://schemas.openxmlformats.org/presentationml/2006/main">
   <p:cSld>
     <p:spTree>
@@ -4990,15 +5184,7 @@
             </a:r>
             <a:r>
               <a:rPr lang="ko-KR" altLang="en-US" dirty="0" smtClean="0"/>
-              <a:t> 작성 후 </a:t>
-            </a:r>
-            <a:r>
-              <a:rPr lang="ko-KR" altLang="en-US" dirty="0" smtClean="0"/>
-              <a:t>가상계좌로 주문 </a:t>
-            </a:r>
-            <a:r>
-              <a:rPr lang="ko-KR" altLang="en-US" dirty="0" smtClean="0"/>
-              <a:t>진행</a:t>
+              <a:t> 작성 후 가상계좌로 주문 진행</a:t>
             </a:r>
           </a:p>
         </p:txBody>
@@ -5016,7 +5202,7 @@
 </p:sld>
 </file>
 
-<file path=ppt/slides/slide6.xml><?xml version="1.0" encoding="utf-8"?>
+<file path=ppt/slides/slide8.xml><?xml version="1.0" encoding="utf-8"?>
 <p:sld xmlns:a="http://schemas.openxmlformats.org/drawingml/2006/main" xmlns:r="http://schemas.openxmlformats.org/officeDocument/2006/relationships" xmlns:p="http://schemas.openxmlformats.org/presentationml/2006/main">
   <p:cSld>
     <p:spTree>
@@ -5157,7 +5343,6 @@
               <a:rPr lang="ko-KR" altLang="en-US" dirty="0" smtClean="0"/>
               <a:t> 전반으로 점검 필요</a:t>
             </a:r>
-            <a:endParaRPr lang="ko-KR" altLang="en-US" dirty="0" smtClean="0"/>
           </a:p>
         </p:txBody>
       </p:sp>
@@ -5201,7 +5386,7 @@
         </p:blipFill>
         <p:spPr>
           <a:xfrm>
-            <a:off x="1138801" y="3074495"/>
+            <a:off x="870353" y="3429000"/>
             <a:ext cx="10303983" cy="682847"/>
           </a:xfrm>
           <a:prstGeom prst="rect">
@@ -5261,7 +5446,35 @@
               <a:rPr lang="ko-KR" altLang="en-US" dirty="0" smtClean="0"/>
               <a:t>페이로드 삽입</a:t>
             </a:r>
-            <a:endParaRPr lang="ko-KR" altLang="en-US" dirty="0" smtClean="0"/>
+          </a:p>
+        </p:txBody>
+      </p:sp>
+      <p:sp>
+        <p:nvSpPr>
+          <p:cNvPr id="4" name="직사각형 3"/>
+          <p:cNvSpPr/>
+          <p:nvPr/>
+        </p:nvSpPr>
+        <p:spPr>
+          <a:xfrm>
+            <a:off x="1148499" y="6196320"/>
+            <a:ext cx="1422121" cy="369332"/>
+          </a:xfrm>
+          <a:prstGeom prst="rect">
+            <a:avLst/>
+          </a:prstGeom>
+        </p:spPr>
+        <p:txBody>
+          <a:bodyPr wrap="none">
+            <a:spAutoFit/>
+          </a:bodyPr>
+          <a:lstStyle/>
+          <a:p>
+            <a:r>
+              <a:rPr lang="ko-KR" altLang="en-US" dirty="0" err="1"/>
+              <a:t>orderMemo</a:t>
+            </a:r>
+            <a:endParaRPr lang="ko-KR" altLang="en-US" dirty="0"/>
           </a:p>
         </p:txBody>
       </p:sp>
@@ -5278,7 +5491,7 @@
 </p:sld>
 </file>
 
-<file path=ppt/slides/slide7.xml><?xml version="1.0" encoding="utf-8"?>
+<file path=ppt/slides/slide9.xml><?xml version="1.0" encoding="utf-8"?>
 <p:sld xmlns:a="http://schemas.openxmlformats.org/drawingml/2006/main" xmlns:r="http://schemas.openxmlformats.org/officeDocument/2006/relationships" xmlns:p="http://schemas.openxmlformats.org/presentationml/2006/main">
   <p:cSld>
     <p:spTree>
@@ -5577,102 +5790,6 @@
     <p:extLst>
       <p:ext uri="{BB962C8B-B14F-4D97-AF65-F5344CB8AC3E}">
         <p14:creationId xmlns:p14="http://schemas.microsoft.com/office/powerpoint/2010/main" val="2152254180"/>
-      </p:ext>
-    </p:extLst>
-  </p:cSld>
-  <p:clrMapOvr>
-    <a:masterClrMapping/>
-  </p:clrMapOvr>
-</p:sld>
-</file>
-
-<file path=ppt/slides/slide8.xml><?xml version="1.0" encoding="utf-8"?>
-<p:sld xmlns:a="http://schemas.openxmlformats.org/drawingml/2006/main" xmlns:r="http://schemas.openxmlformats.org/officeDocument/2006/relationships" xmlns:p="http://schemas.openxmlformats.org/presentationml/2006/main">
-  <p:cSld>
-    <p:spTree>
-      <p:nvGrpSpPr>
-        <p:cNvPr id="1" name=""/>
-        <p:cNvGrpSpPr/>
-        <p:nvPr/>
-      </p:nvGrpSpPr>
-      <p:grpSpPr>
-        <a:xfrm>
-          <a:off x="0" y="0"/>
-          <a:ext cx="0" cy="0"/>
-          <a:chOff x="0" y="0"/>
-          <a:chExt cx="0" cy="0"/>
-        </a:xfrm>
-      </p:grpSpPr>
-    </p:spTree>
-    <p:extLst>
-      <p:ext uri="{BB962C8B-B14F-4D97-AF65-F5344CB8AC3E}">
-        <p14:creationId xmlns:p14="http://schemas.microsoft.com/office/powerpoint/2010/main" val="884528956"/>
-      </p:ext>
-    </p:extLst>
-  </p:cSld>
-  <p:clrMapOvr>
-    <a:masterClrMapping/>
-  </p:clrMapOvr>
-</p:sld>
-</file>
-
-<file path=ppt/slides/slide9.xml><?xml version="1.0" encoding="utf-8"?>
-<p:sld xmlns:a="http://schemas.openxmlformats.org/drawingml/2006/main" xmlns:r="http://schemas.openxmlformats.org/officeDocument/2006/relationships" xmlns:p="http://schemas.openxmlformats.org/presentationml/2006/main">
-  <p:cSld>
-    <p:spTree>
-      <p:nvGrpSpPr>
-        <p:cNvPr id="1" name=""/>
-        <p:cNvGrpSpPr/>
-        <p:nvPr/>
-      </p:nvGrpSpPr>
-      <p:grpSpPr>
-        <a:xfrm>
-          <a:off x="0" y="0"/>
-          <a:ext cx="0" cy="0"/>
-          <a:chOff x="0" y="0"/>
-          <a:chExt cx="0" cy="0"/>
-        </a:xfrm>
-      </p:grpSpPr>
-      <p:sp>
-        <p:nvSpPr>
-          <p:cNvPr id="7" name="제목 6"/>
-          <p:cNvSpPr>
-            <a:spLocks noGrp="1"/>
-          </p:cNvSpPr>
-          <p:nvPr>
-            <p:ph type="ctrTitle"/>
-          </p:nvPr>
-        </p:nvSpPr>
-        <p:spPr>
-          <a:xfrm>
-            <a:off x="1524000" y="2296822"/>
-            <a:ext cx="9144000" cy="2387600"/>
-          </a:xfrm>
-        </p:spPr>
-        <p:txBody>
-          <a:bodyPr anchor="ctr"/>
-          <a:lstStyle/>
-          <a:p>
-            <a:r>
-              <a:rPr lang="en-US" altLang="ko-KR" dirty="0"/>
-              <a:t>5</a:t>
-            </a:r>
-            <a:r>
-              <a:rPr lang="en-US" altLang="ko-KR" dirty="0" smtClean="0"/>
-              <a:t> </a:t>
-            </a:r>
-            <a:r>
-              <a:rPr lang="ko-KR" altLang="en-US" dirty="0" smtClean="0"/>
-              <a:t>정보 누출</a:t>
-            </a:r>
-            <a:endParaRPr lang="ko-KR" altLang="en-US" dirty="0"/>
-          </a:p>
-        </p:txBody>
-      </p:sp>
-    </p:spTree>
-    <p:extLst>
-      <p:ext uri="{BB962C8B-B14F-4D97-AF65-F5344CB8AC3E}">
-        <p14:creationId xmlns:p14="http://schemas.microsoft.com/office/powerpoint/2010/main" val="4132780744"/>
       </p:ext>
     </p:extLst>
   </p:cSld>
